--- a/adval-mbo/あどばる_スマサポ合併_想定株主名簿_20261023.pptx
+++ b/adval-mbo/あどばる_スマサポ合併_想定株主名簿_20261023.pptx
@@ -859,7 +859,7 @@
           <a:p>
             <a:r>
               <a:rPr lang="en-US" dirty="0"/>
-              <a:t>A案が筋。ビジョンに市場で売ってもらえば流通比率も中野の資金負担も解決する。</a:t>
+              <a:t>D案は惜しくも2,156株足りない。6社も売れば一気に楽になる。太田玲の扱いが鍵。</a:t>
             </a:r>
             <a:endParaRPr lang="en-US" dirty="0"/>
           </a:p>
@@ -10110,7 +10110,7 @@
                 <a:ea typeface="Meiryo" pitchFamily="34" charset="-122"/>
                 <a:cs typeface="Meiryo" pitchFamily="34" charset="-120"/>
               </a:rPr>
-              <a:t>ビジョン社の20.07%を、どう処理するか</a:t>
+              <a:t>ビジョン社の844,617株を、どう配分するか</a:t>
             </a:r>
             <a:endParaRPr lang="en-US" sz="2800" dirty="0"/>
           </a:p>
@@ -10125,11 +10125,11 @@
         <p:spPr>
           <a:xfrm>
             <a:off x="640080" y="1536192"/>
-            <a:ext cx="3520440" cy="3200400"/>
+            <a:ext cx="2606040" cy="3017520"/>
           </a:xfrm>
           <a:prstGeom prst="roundRect">
             <a:avLst>
-              <a:gd name="adj" fmla="val 1714"/>
+              <a:gd name="adj" fmla="val 2105"/>
             </a:avLst>
           </a:prstGeom>
           <a:solidFill>
@@ -10158,8 +10158,8 @@
         </p:nvSpPr>
         <p:spPr>
           <a:xfrm>
-            <a:off x="914400" y="1737360"/>
-            <a:ext cx="457200" cy="292608"/>
+            <a:off x="868680" y="1719072"/>
+            <a:ext cx="420624" cy="274320"/>
           </a:xfrm>
           <a:prstGeom prst="roundRect">
             <a:avLst>
@@ -10180,8 +10180,8 @@
         </p:nvSpPr>
         <p:spPr>
           <a:xfrm>
-            <a:off x="914400" y="1737360"/>
-            <a:ext cx="457200" cy="292608"/>
+            <a:off x="868680" y="1719072"/>
+            <a:ext cx="420624" cy="274320"/>
           </a:xfrm>
           <a:prstGeom prst="rect">
             <a:avLst/>
@@ -10219,8 +10219,8 @@
         </p:nvSpPr>
         <p:spPr>
           <a:xfrm>
-            <a:off x="1508760" y="1737360"/>
-            <a:ext cx="2468880" cy="292608"/>
+            <a:off x="1371600" y="1719072"/>
+            <a:ext cx="1691640" cy="274320"/>
           </a:xfrm>
           <a:prstGeom prst="rect">
             <a:avLst/>
@@ -10236,7 +10236,7 @@
               <a:buNone/>
             </a:pPr>
             <a:r>
-              <a:rPr lang="en-US" sz="1300" b="1" dirty="0">
+              <a:rPr lang="en-US" sz="1100" b="1" dirty="0">
                 <a:solidFill>
                   <a:srgbClr val="1E2A38"/>
                 </a:solidFill>
@@ -10244,9 +10244,9 @@
                 <a:ea typeface="Meiryo" pitchFamily="34" charset="-122"/>
                 <a:cs typeface="Meiryo" pitchFamily="34" charset="-120"/>
               </a:rPr>
-              <a:t>市場へ放出する</a:t>
-            </a:r>
-            <a:endParaRPr lang="en-US" sz="1300" dirty="0"/>
+              <a:t>全部を市場へ</a:t>
+            </a:r>
+            <a:endParaRPr lang="en-US" sz="1100" dirty="0"/>
           </a:p>
         </p:txBody>
       </p:sp>
@@ -10258,8 +10258,8 @@
         </p:nvSpPr>
         <p:spPr>
           <a:xfrm>
-            <a:off x="914400" y="2157984"/>
-            <a:ext cx="2971800" cy="219456"/>
+            <a:off x="868680" y="2121408"/>
+            <a:ext cx="2148840" cy="219456"/>
           </a:xfrm>
           <a:prstGeom prst="rect">
             <a:avLst/>
@@ -10275,7 +10275,7 @@
               <a:buNone/>
             </a:pPr>
             <a:r>
-              <a:rPr lang="en-US" sz="950" dirty="0">
+              <a:rPr lang="en-US" sz="900" dirty="0">
                 <a:solidFill>
                   <a:srgbClr val="7C8A99"/>
                 </a:solidFill>
@@ -10285,7 +10285,7 @@
               </a:rPr>
               <a:t>中野の必要資金</a:t>
             </a:r>
-            <a:endParaRPr lang="en-US" sz="950" dirty="0"/>
+            <a:endParaRPr lang="en-US" sz="900" dirty="0"/>
           </a:p>
         </p:txBody>
       </p:sp>
@@ -10297,8 +10297,8 @@
         </p:nvSpPr>
         <p:spPr>
           <a:xfrm>
-            <a:off x="914400" y="2359152"/>
-            <a:ext cx="2971800" cy="512064"/>
+            <a:off x="868680" y="2322576"/>
+            <a:ext cx="2148840" cy="457200"/>
           </a:xfrm>
           <a:prstGeom prst="rect">
             <a:avLst/>
@@ -10314,7 +10314,7 @@
               <a:buNone/>
             </a:pPr>
             <a:r>
-              <a:rPr lang="en-US" sz="3000" b="1" dirty="0">
+              <a:rPr lang="en-US" sz="2600" b="1" dirty="0">
                 <a:solidFill>
                   <a:srgbClr val="2C6A4E"/>
                 </a:solidFill>
@@ -10328,7 +10328,7 @@
               <a:buNone/>
             </a:pPr>
             <a:r>
-              <a:rPr lang="en-US" sz="1300" b="1" dirty="0">
+              <a:rPr lang="en-US" sz="1200" b="1" dirty="0">
                 <a:solidFill>
                   <a:srgbClr val="2C6A4E"/>
                 </a:solidFill>
@@ -10338,7 +10338,7 @@
               </a:rPr>
               <a:t>億円</a:t>
             </a:r>
-            <a:endParaRPr lang="en-US" sz="3000" dirty="0"/>
+            <a:endParaRPr lang="en-US" sz="2600" dirty="0"/>
           </a:p>
         </p:txBody>
       </p:sp>
@@ -10350,8 +10350,8 @@
         </p:nvSpPr>
         <p:spPr>
           <a:xfrm>
-            <a:off x="914400" y="2926080"/>
-            <a:ext cx="2971800" cy="256032"/>
+            <a:off x="868680" y="2852928"/>
+            <a:ext cx="2148840" cy="219456"/>
           </a:xfrm>
           <a:prstGeom prst="rect">
             <a:avLst/>
@@ -10367,17 +10367,17 @@
               <a:buNone/>
             </a:pPr>
             <a:r>
-              <a:rPr lang="en-US" sz="1200" b="1" dirty="0">
-                <a:solidFill>
-                  <a:srgbClr val="1E2A38"/>
-                </a:solidFill>
-                <a:latin typeface="Meiryo" pitchFamily="34" charset="0"/>
-                <a:ea typeface="Meiryo" pitchFamily="34" charset="-122"/>
-                <a:cs typeface="Meiryo" pitchFamily="34" charset="-120"/>
-              </a:rPr>
-              <a:t>中野 15.73%（第2位）</a:t>
-            </a:r>
-            <a:endParaRPr lang="en-US" sz="1200" dirty="0"/>
+              <a:rPr lang="en-US" sz="900" dirty="0">
+                <a:solidFill>
+                  <a:srgbClr val="7C8A99"/>
+                </a:solidFill>
+                <a:latin typeface="Meiryo" pitchFamily="34" charset="0"/>
+                <a:ea typeface="Meiryo" pitchFamily="34" charset="-122"/>
+                <a:cs typeface="Meiryo" pitchFamily="34" charset="-120"/>
+              </a:rPr>
+              <a:t>中野の持分</a:t>
+            </a:r>
+            <a:endParaRPr lang="en-US" sz="900" dirty="0"/>
           </a:p>
         </p:txBody>
       </p:sp>
@@ -10389,8 +10389,8 @@
         </p:nvSpPr>
         <p:spPr>
           <a:xfrm>
-            <a:off x="914400" y="3200400"/>
-            <a:ext cx="2971800" cy="256032"/>
+            <a:off x="868680" y="3054096"/>
+            <a:ext cx="2148840" cy="256032"/>
           </a:xfrm>
           <a:prstGeom prst="rect">
             <a:avLst/>
@@ -10406,17 +10406,17 @@
               <a:buNone/>
             </a:pPr>
             <a:r>
-              <a:rPr lang="en-US" sz="1100" b="1" dirty="0">
-                <a:solidFill>
-                  <a:srgbClr val="2C6A4E"/>
-                </a:solidFill>
-                <a:latin typeface="Meiryo" pitchFamily="34" charset="0"/>
-                <a:ea typeface="Meiryo" pitchFamily="34" charset="-122"/>
-                <a:cs typeface="Meiryo" pitchFamily="34" charset="-120"/>
-              </a:rPr>
-              <a:t>流通株式比率 40.02%</a:t>
-            </a:r>
-            <a:endParaRPr lang="en-US" sz="1100" dirty="0"/>
+              <a:rPr lang="en-US" sz="1250" b="1" dirty="0">
+                <a:solidFill>
+                  <a:srgbClr val="1E2A38"/>
+                </a:solidFill>
+                <a:latin typeface="Meiryo" pitchFamily="34" charset="0"/>
+                <a:ea typeface="Meiryo" pitchFamily="34" charset="-122"/>
+                <a:cs typeface="Meiryo" pitchFamily="34" charset="-120"/>
+              </a:rPr>
+              <a:t>15.73%（第2位）</a:t>
+            </a:r>
+            <a:endParaRPr lang="en-US" sz="1250" dirty="0"/>
           </a:p>
         </p:txBody>
       </p:sp>
@@ -10428,8 +10428,86 @@
         </p:nvSpPr>
         <p:spPr>
           <a:xfrm>
-            <a:off x="914400" y="3547872"/>
-            <a:ext cx="2971800" cy="1097280"/>
+            <a:off x="868680" y="3401568"/>
+            <a:ext cx="2148840" cy="219456"/>
+          </a:xfrm>
+          <a:prstGeom prst="rect">
+            <a:avLst/>
+          </a:prstGeom>
+          <a:noFill/>
+          <a:ln/>
+        </p:spPr>
+        <p:txBody>
+          <a:bodyPr wrap="square" lIns="0" tIns="0" rIns="0" bIns="0" rtlCol="0" anchor="ctr"/>
+          <a:lstStyle/>
+          <a:p>
+            <a:pPr indent="0" marL="0">
+              <a:buNone/>
+            </a:pPr>
+            <a:r>
+              <a:rPr lang="en-US" sz="900" dirty="0">
+                <a:solidFill>
+                  <a:srgbClr val="7C8A99"/>
+                </a:solidFill>
+                <a:latin typeface="Meiryo" pitchFamily="34" charset="0"/>
+                <a:ea typeface="Meiryo" pitchFamily="34" charset="-122"/>
+                <a:cs typeface="Meiryo" pitchFamily="34" charset="-120"/>
+              </a:rPr>
+              <a:t>流通株式比率</a:t>
+            </a:r>
+            <a:endParaRPr lang="en-US" sz="900" dirty="0"/>
+          </a:p>
+        </p:txBody>
+      </p:sp>
+      <p:sp>
+        <p:nvSpPr>
+          <p:cNvPr id="13" name="Text 11"/>
+          <p:cNvSpPr txBox="1"/>
+          <p:nvPr/>
+        </p:nvSpPr>
+        <p:spPr>
+          <a:xfrm>
+            <a:off x="868680" y="3602736"/>
+            <a:ext cx="2148840" cy="310896"/>
+          </a:xfrm>
+          <a:prstGeom prst="rect">
+            <a:avLst/>
+          </a:prstGeom>
+          <a:noFill/>
+          <a:ln/>
+        </p:spPr>
+        <p:txBody>
+          <a:bodyPr wrap="square" lIns="0" tIns="0" rIns="0" bIns="0" rtlCol="0" anchor="ctr"/>
+          <a:lstStyle/>
+          <a:p>
+            <a:pPr indent="0" marL="0">
+              <a:buNone/>
+            </a:pPr>
+            <a:r>
+              <a:rPr lang="en-US" sz="1700" b="1" dirty="0">
+                <a:solidFill>
+                  <a:srgbClr val="2C6A4E"/>
+                </a:solidFill>
+                <a:latin typeface="Meiryo" pitchFamily="34" charset="0"/>
+                <a:ea typeface="Meiryo" pitchFamily="34" charset="-122"/>
+                <a:cs typeface="Meiryo" pitchFamily="34" charset="-120"/>
+              </a:rPr>
+              <a:t>40.02%</a:t>
+            </a:r>
+            <a:endParaRPr lang="en-US" sz="1700" dirty="0"/>
+          </a:p>
+        </p:txBody>
+      </p:sp>
+      <p:sp>
+        <p:nvSpPr>
+          <p:cNvPr id="14" name="Text 12"/>
+          <p:cNvSpPr txBox="1"/>
+          <p:nvPr/>
+        </p:nvSpPr>
+        <p:spPr>
+          <a:xfrm>
+            <a:off x="868680" y="3968496"/>
+            <a:ext cx="2148840" cy="457200"/>
           </a:xfrm>
           <a:prstGeom prst="rect">
             <a:avLst/>
@@ -10443,39 +10521,39 @@
           <a:p>
             <a:pPr indent="0" marL="0">
               <a:lnSpc>
-                <a:spcPct val="120000"/>
+                <a:spcPct val="115000"/>
               </a:lnSpc>
               <a:buNone/>
             </a:pPr>
             <a:r>
-              <a:rPr lang="en-US" sz="950" dirty="0">
-                <a:solidFill>
-                  <a:srgbClr val="3D4E60"/>
-                </a:solidFill>
-                <a:latin typeface="Meiryo" pitchFamily="34" charset="0"/>
-                <a:ea typeface="Meiryo" pitchFamily="34" charset="-122"/>
-                <a:cs typeface="Meiryo" pitchFamily="34" charset="-120"/>
-              </a:rPr>
-              <a:t>ビジョン株が市場に出るため流通株式比率が19.95%から40.02%へ改善し、上場維持基準をクリアします。中野の持ち出しはゼロです。</a:t>
-            </a:r>
-            <a:endParaRPr lang="en-US" sz="950" dirty="0"/>
-          </a:p>
-        </p:txBody>
-      </p:sp>
-      <p:sp>
-        <p:nvSpPr>
-          <p:cNvPr id="13" name="Shape 11"/>
+              <a:rPr lang="en-US" sz="900" dirty="0">
+                <a:solidFill>
+                  <a:srgbClr val="2C6A4E"/>
+                </a:solidFill>
+                <a:latin typeface="Meiryo" pitchFamily="34" charset="0"/>
+                <a:ea typeface="Meiryo" pitchFamily="34" charset="-122"/>
+                <a:cs typeface="Meiryo" pitchFamily="34" charset="-120"/>
+              </a:rPr>
+              <a:t>東証グロース基準25%をクリア</a:t>
+            </a:r>
+            <a:endParaRPr lang="en-US" sz="900" dirty="0"/>
+          </a:p>
+        </p:txBody>
+      </p:sp>
+      <p:sp>
+        <p:nvSpPr>
+          <p:cNvPr id="15" name="Shape 13"/>
           <p:cNvSpPr/>
           <p:nvPr/>
         </p:nvSpPr>
         <p:spPr>
           <a:xfrm>
-            <a:off x="4297680" y="1536192"/>
-            <a:ext cx="3520440" cy="3200400"/>
+            <a:off x="3401568" y="1536192"/>
+            <a:ext cx="2606040" cy="3017520"/>
           </a:xfrm>
           <a:prstGeom prst="roundRect">
             <a:avLst>
-              <a:gd name="adj" fmla="val 1714"/>
+              <a:gd name="adj" fmla="val 2105"/>
             </a:avLst>
           </a:prstGeom>
           <a:solidFill>
@@ -10498,14 +10576,14 @@
       </p:sp>
       <p:sp>
         <p:nvSpPr>
-          <p:cNvPr id="14" name="Shape 12"/>
+          <p:cNvPr id="16" name="Shape 14"/>
           <p:cNvSpPr/>
           <p:nvPr/>
         </p:nvSpPr>
         <p:spPr>
           <a:xfrm>
-            <a:off x="4572000" y="1737360"/>
-            <a:ext cx="457200" cy="292608"/>
+            <a:off x="3630168" y="1719072"/>
+            <a:ext cx="420624" cy="274320"/>
           </a:xfrm>
           <a:prstGeom prst="roundRect">
             <a:avLst>
@@ -10513,88 +10591,10 @@
             </a:avLst>
           </a:prstGeom>
           <a:solidFill>
-            <a:srgbClr val="6E2639"/>
+            <a:srgbClr val="8A2E26"/>
           </a:solidFill>
           <a:ln/>
         </p:spPr>
-      </p:sp>
-      <p:sp>
-        <p:nvSpPr>
-          <p:cNvPr id="15" name="Text 13"/>
-          <p:cNvSpPr txBox="1"/>
-          <p:nvPr/>
-        </p:nvSpPr>
-        <p:spPr>
-          <a:xfrm>
-            <a:off x="4572000" y="1737360"/>
-            <a:ext cx="457200" cy="292608"/>
-          </a:xfrm>
-          <a:prstGeom prst="rect">
-            <a:avLst/>
-          </a:prstGeom>
-          <a:noFill/>
-          <a:ln/>
-        </p:spPr>
-        <p:txBody>
-          <a:bodyPr wrap="square" lIns="0" tIns="0" rIns="0" bIns="0" rtlCol="0" anchor="ctr"/>
-          <a:lstStyle/>
-          <a:p>
-            <a:pPr algn="ctr" indent="0" marL="0">
-              <a:buNone/>
-            </a:pPr>
-            <a:r>
-              <a:rPr lang="en-US" sz="1150" b="1" dirty="0">
-                <a:solidFill>
-                  <a:srgbClr val="FFFFFF"/>
-                </a:solidFill>
-                <a:latin typeface="Meiryo" pitchFamily="34" charset="0"/>
-                <a:ea typeface="Meiryo" pitchFamily="34" charset="-122"/>
-                <a:cs typeface="Meiryo" pitchFamily="34" charset="-120"/>
-              </a:rPr>
-              <a:t>B</a:t>
-            </a:r>
-            <a:endParaRPr lang="en-US" sz="1150" dirty="0"/>
-          </a:p>
-        </p:txBody>
-      </p:sp>
-      <p:sp>
-        <p:nvSpPr>
-          <p:cNvPr id="16" name="Text 14"/>
-          <p:cNvSpPr txBox="1"/>
-          <p:nvPr/>
-        </p:nvSpPr>
-        <p:spPr>
-          <a:xfrm>
-            <a:off x="5166360" y="1737360"/>
-            <a:ext cx="2468880" cy="292608"/>
-          </a:xfrm>
-          <a:prstGeom prst="rect">
-            <a:avLst/>
-          </a:prstGeom>
-          <a:noFill/>
-          <a:ln/>
-        </p:spPr>
-        <p:txBody>
-          <a:bodyPr wrap="square" lIns="0" tIns="0" rIns="0" bIns="0" rtlCol="0" anchor="ctr"/>
-          <a:lstStyle/>
-          <a:p>
-            <a:pPr indent="0" marL="0">
-              <a:buNone/>
-            </a:pPr>
-            <a:r>
-              <a:rPr lang="en-US" sz="1300" b="1" dirty="0">
-                <a:solidFill>
-                  <a:srgbClr val="1E2A38"/>
-                </a:solidFill>
-                <a:latin typeface="Meiryo" pitchFamily="34" charset="0"/>
-                <a:ea typeface="Meiryo" pitchFamily="34" charset="-122"/>
-                <a:cs typeface="Meiryo" pitchFamily="34" charset="-120"/>
-              </a:rPr>
-              <a:t>太田氏側と同数まで買う</a:t>
-            </a:r>
-            <a:endParaRPr lang="en-US" sz="1300" dirty="0"/>
-          </a:p>
-        </p:txBody>
       </p:sp>
       <p:sp>
         <p:nvSpPr>
@@ -10604,8 +10604,8 @@
         </p:nvSpPr>
         <p:spPr>
           <a:xfrm>
-            <a:off x="4572000" y="2157984"/>
-            <a:ext cx="2971800" cy="219456"/>
+            <a:off x="3630168" y="1719072"/>
+            <a:ext cx="420624" cy="274320"/>
           </a:xfrm>
           <a:prstGeom prst="rect">
             <a:avLst/>
@@ -10617,21 +10617,21 @@
           <a:bodyPr wrap="square" lIns="0" tIns="0" rIns="0" bIns="0" rtlCol="0" anchor="ctr"/>
           <a:lstStyle/>
           <a:p>
-            <a:pPr indent="0" marL="0">
-              <a:buNone/>
-            </a:pPr>
-            <a:r>
-              <a:rPr lang="en-US" sz="950" dirty="0">
-                <a:solidFill>
-                  <a:srgbClr val="7C8A99"/>
-                </a:solidFill>
-                <a:latin typeface="Meiryo" pitchFamily="34" charset="0"/>
-                <a:ea typeface="Meiryo" pitchFamily="34" charset="-122"/>
-                <a:cs typeface="Meiryo" pitchFamily="34" charset="-120"/>
-              </a:rPr>
-              <a:t>中野の必要資金</a:t>
-            </a:r>
-            <a:endParaRPr lang="en-US" sz="950" dirty="0"/>
+            <a:pPr algn="ctr" indent="0" marL="0">
+              <a:buNone/>
+            </a:pPr>
+            <a:r>
+              <a:rPr lang="en-US" sz="1150" b="1" dirty="0">
+                <a:solidFill>
+                  <a:srgbClr val="FFFFFF"/>
+                </a:solidFill>
+                <a:latin typeface="Meiryo" pitchFamily="34" charset="0"/>
+                <a:ea typeface="Meiryo" pitchFamily="34" charset="-122"/>
+                <a:cs typeface="Meiryo" pitchFamily="34" charset="-120"/>
+              </a:rPr>
+              <a:t>B</a:t>
+            </a:r>
+            <a:endParaRPr lang="en-US" sz="1150" dirty="0"/>
           </a:p>
         </p:txBody>
       </p:sp>
@@ -10643,8 +10643,8 @@
         </p:nvSpPr>
         <p:spPr>
           <a:xfrm>
-            <a:off x="4572000" y="2359152"/>
-            <a:ext cx="2971800" cy="512064"/>
+            <a:off x="4133088" y="1719072"/>
+            <a:ext cx="1691640" cy="274320"/>
           </a:xfrm>
           <a:prstGeom prst="rect">
             <a:avLst/>
@@ -10660,31 +10660,17 @@
               <a:buNone/>
             </a:pPr>
             <a:r>
-              <a:rPr lang="en-US" sz="3000" b="1" dirty="0">
-                <a:solidFill>
-                  <a:srgbClr val="6E2639"/>
-                </a:solidFill>
-                <a:latin typeface="Meiryo" pitchFamily="34" charset="0"/>
-                <a:ea typeface="Meiryo" pitchFamily="34" charset="-122"/>
-                <a:cs typeface="Meiryo" pitchFamily="34" charset="-120"/>
-              </a:rPr>
-              <a:t>5.27</a:t>
-            </a:r>
-            <a:pPr indent="0" marL="0">
-              <a:buNone/>
-            </a:pPr>
-            <a:r>
-              <a:rPr lang="en-US" sz="1300" b="1" dirty="0">
-                <a:solidFill>
-                  <a:srgbClr val="6E2639"/>
-                </a:solidFill>
-                <a:latin typeface="Meiryo" pitchFamily="34" charset="0"/>
-                <a:ea typeface="Meiryo" pitchFamily="34" charset="-122"/>
-                <a:cs typeface="Meiryo" pitchFamily="34" charset="-120"/>
-              </a:rPr>
-              <a:t>億円</a:t>
-            </a:r>
-            <a:endParaRPr lang="en-US" sz="3000" dirty="0"/>
+              <a:rPr lang="en-US" sz="1100" b="1" dirty="0">
+                <a:solidFill>
+                  <a:srgbClr val="1E2A38"/>
+                </a:solidFill>
+                <a:latin typeface="Meiryo" pitchFamily="34" charset="0"/>
+                <a:ea typeface="Meiryo" pitchFamily="34" charset="-122"/>
+                <a:cs typeface="Meiryo" pitchFamily="34" charset="-120"/>
+              </a:rPr>
+              <a:t>太田氏側と同数まで買う</a:t>
+            </a:r>
+            <a:endParaRPr lang="en-US" sz="1100" dirty="0"/>
           </a:p>
         </p:txBody>
       </p:sp>
@@ -10696,8 +10682,8 @@
         </p:nvSpPr>
         <p:spPr>
           <a:xfrm>
-            <a:off x="4572000" y="2926080"/>
-            <a:ext cx="2971800" cy="256032"/>
+            <a:off x="3630168" y="2121408"/>
+            <a:ext cx="2148840" cy="219456"/>
           </a:xfrm>
           <a:prstGeom prst="rect">
             <a:avLst/>
@@ -10713,17 +10699,17 @@
               <a:buNone/>
             </a:pPr>
             <a:r>
-              <a:rPr lang="en-US" sz="1200" b="1" dirty="0">
-                <a:solidFill>
-                  <a:srgbClr val="1E2A38"/>
-                </a:solidFill>
-                <a:latin typeface="Meiryo" pitchFamily="34" charset="0"/>
-                <a:ea typeface="Meiryo" pitchFamily="34" charset="-122"/>
-                <a:cs typeface="Meiryo" pitchFamily="34" charset="-120"/>
-              </a:rPr>
-              <a:t>中野 30.80%（同率首位）</a:t>
-            </a:r>
-            <a:endParaRPr lang="en-US" sz="1200" dirty="0"/>
+              <a:rPr lang="en-US" sz="900" dirty="0">
+                <a:solidFill>
+                  <a:srgbClr val="7C8A99"/>
+                </a:solidFill>
+                <a:latin typeface="Meiryo" pitchFamily="34" charset="0"/>
+                <a:ea typeface="Meiryo" pitchFamily="34" charset="-122"/>
+                <a:cs typeface="Meiryo" pitchFamily="34" charset="-120"/>
+              </a:rPr>
+              <a:t>中野の必要資金</a:t>
+            </a:r>
+            <a:endParaRPr lang="en-US" sz="900" dirty="0"/>
           </a:p>
         </p:txBody>
       </p:sp>
@@ -10735,8 +10721,8 @@
         </p:nvSpPr>
         <p:spPr>
           <a:xfrm>
-            <a:off x="4572000" y="3200400"/>
-            <a:ext cx="2971800" cy="256032"/>
+            <a:off x="3630168" y="2322576"/>
+            <a:ext cx="2148840" cy="457200"/>
           </a:xfrm>
           <a:prstGeom prst="rect">
             <a:avLst/>
@@ -10752,17 +10738,31 @@
               <a:buNone/>
             </a:pPr>
             <a:r>
-              <a:rPr lang="en-US" sz="1100" b="1" dirty="0">
-                <a:solidFill>
-                  <a:srgbClr val="6E2639"/>
-                </a:solidFill>
-                <a:latin typeface="Meiryo" pitchFamily="34" charset="0"/>
-                <a:ea typeface="Meiryo" pitchFamily="34" charset="-122"/>
-                <a:cs typeface="Meiryo" pitchFamily="34" charset="-120"/>
-              </a:rPr>
-              <a:t>流通株式比率は低下</a:t>
-            </a:r>
-            <a:endParaRPr lang="en-US" sz="1100" dirty="0"/>
+              <a:rPr lang="en-US" sz="2600" b="1" dirty="0">
+                <a:solidFill>
+                  <a:srgbClr val="8A2E26"/>
+                </a:solidFill>
+                <a:latin typeface="Meiryo" pitchFamily="34" charset="0"/>
+                <a:ea typeface="Meiryo" pitchFamily="34" charset="-122"/>
+                <a:cs typeface="Meiryo" pitchFamily="34" charset="-120"/>
+              </a:rPr>
+              <a:t>5.27</a:t>
+            </a:r>
+            <a:pPr indent="0" marL="0">
+              <a:buNone/>
+            </a:pPr>
+            <a:r>
+              <a:rPr lang="en-US" sz="1200" b="1" dirty="0">
+                <a:solidFill>
+                  <a:srgbClr val="8A2E26"/>
+                </a:solidFill>
+                <a:latin typeface="Meiryo" pitchFamily="34" charset="0"/>
+                <a:ea typeface="Meiryo" pitchFamily="34" charset="-122"/>
+                <a:cs typeface="Meiryo" pitchFamily="34" charset="-120"/>
+              </a:rPr>
+              <a:t>億円</a:t>
+            </a:r>
+            <a:endParaRPr lang="en-US" sz="2600" dirty="0"/>
           </a:p>
         </p:txBody>
       </p:sp>
@@ -10774,8 +10774,164 @@
         </p:nvSpPr>
         <p:spPr>
           <a:xfrm>
-            <a:off x="4572000" y="3547872"/>
-            <a:ext cx="2971800" cy="1097280"/>
+            <a:off x="3630168" y="2852928"/>
+            <a:ext cx="2148840" cy="219456"/>
+          </a:xfrm>
+          <a:prstGeom prst="rect">
+            <a:avLst/>
+          </a:prstGeom>
+          <a:noFill/>
+          <a:ln/>
+        </p:spPr>
+        <p:txBody>
+          <a:bodyPr wrap="square" lIns="0" tIns="0" rIns="0" bIns="0" rtlCol="0" anchor="ctr"/>
+          <a:lstStyle/>
+          <a:p>
+            <a:pPr indent="0" marL="0">
+              <a:buNone/>
+            </a:pPr>
+            <a:r>
+              <a:rPr lang="en-US" sz="900" dirty="0">
+                <a:solidFill>
+                  <a:srgbClr val="7C8A99"/>
+                </a:solidFill>
+                <a:latin typeface="Meiryo" pitchFamily="34" charset="0"/>
+                <a:ea typeface="Meiryo" pitchFamily="34" charset="-122"/>
+                <a:cs typeface="Meiryo" pitchFamily="34" charset="-120"/>
+              </a:rPr>
+              <a:t>中野の持分</a:t>
+            </a:r>
+            <a:endParaRPr lang="en-US" sz="900" dirty="0"/>
+          </a:p>
+        </p:txBody>
+      </p:sp>
+      <p:sp>
+        <p:nvSpPr>
+          <p:cNvPr id="22" name="Text 20"/>
+          <p:cNvSpPr txBox="1"/>
+          <p:nvPr/>
+        </p:nvSpPr>
+        <p:spPr>
+          <a:xfrm>
+            <a:off x="3630168" y="3054096"/>
+            <a:ext cx="2148840" cy="256032"/>
+          </a:xfrm>
+          <a:prstGeom prst="rect">
+            <a:avLst/>
+          </a:prstGeom>
+          <a:noFill/>
+          <a:ln/>
+        </p:spPr>
+        <p:txBody>
+          <a:bodyPr wrap="square" lIns="0" tIns="0" rIns="0" bIns="0" rtlCol="0" anchor="ctr"/>
+          <a:lstStyle/>
+          <a:p>
+            <a:pPr indent="0" marL="0">
+              <a:buNone/>
+            </a:pPr>
+            <a:r>
+              <a:rPr lang="en-US" sz="1250" b="1" dirty="0">
+                <a:solidFill>
+                  <a:srgbClr val="1E2A38"/>
+                </a:solidFill>
+                <a:latin typeface="Meiryo" pitchFamily="34" charset="0"/>
+                <a:ea typeface="Meiryo" pitchFamily="34" charset="-122"/>
+                <a:cs typeface="Meiryo" pitchFamily="34" charset="-120"/>
+              </a:rPr>
+              <a:t>30.80%（同率首位）</a:t>
+            </a:r>
+            <a:endParaRPr lang="en-US" sz="1250" dirty="0"/>
+          </a:p>
+        </p:txBody>
+      </p:sp>
+      <p:sp>
+        <p:nvSpPr>
+          <p:cNvPr id="23" name="Text 21"/>
+          <p:cNvSpPr txBox="1"/>
+          <p:nvPr/>
+        </p:nvSpPr>
+        <p:spPr>
+          <a:xfrm>
+            <a:off x="3630168" y="3401568"/>
+            <a:ext cx="2148840" cy="219456"/>
+          </a:xfrm>
+          <a:prstGeom prst="rect">
+            <a:avLst/>
+          </a:prstGeom>
+          <a:noFill/>
+          <a:ln/>
+        </p:spPr>
+        <p:txBody>
+          <a:bodyPr wrap="square" lIns="0" tIns="0" rIns="0" bIns="0" rtlCol="0" anchor="ctr"/>
+          <a:lstStyle/>
+          <a:p>
+            <a:pPr indent="0" marL="0">
+              <a:buNone/>
+            </a:pPr>
+            <a:r>
+              <a:rPr lang="en-US" sz="900" dirty="0">
+                <a:solidFill>
+                  <a:srgbClr val="7C8A99"/>
+                </a:solidFill>
+                <a:latin typeface="Meiryo" pitchFamily="34" charset="0"/>
+                <a:ea typeface="Meiryo" pitchFamily="34" charset="-122"/>
+                <a:cs typeface="Meiryo" pitchFamily="34" charset="-120"/>
+              </a:rPr>
+              <a:t>流通株式比率</a:t>
+            </a:r>
+            <a:endParaRPr lang="en-US" sz="900" dirty="0"/>
+          </a:p>
+        </p:txBody>
+      </p:sp>
+      <p:sp>
+        <p:nvSpPr>
+          <p:cNvPr id="24" name="Text 22"/>
+          <p:cNvSpPr txBox="1"/>
+          <p:nvPr/>
+        </p:nvSpPr>
+        <p:spPr>
+          <a:xfrm>
+            <a:off x="3630168" y="3602736"/>
+            <a:ext cx="2148840" cy="310896"/>
+          </a:xfrm>
+          <a:prstGeom prst="rect">
+            <a:avLst/>
+          </a:prstGeom>
+          <a:noFill/>
+          <a:ln/>
+        </p:spPr>
+        <p:txBody>
+          <a:bodyPr wrap="square" lIns="0" tIns="0" rIns="0" bIns="0" rtlCol="0" anchor="ctr"/>
+          <a:lstStyle/>
+          <a:p>
+            <a:pPr indent="0" marL="0">
+              <a:buNone/>
+            </a:pPr>
+            <a:r>
+              <a:rPr lang="en-US" sz="1700" b="1" dirty="0">
+                <a:solidFill>
+                  <a:srgbClr val="8A2E26"/>
+                </a:solidFill>
+                <a:latin typeface="Meiryo" pitchFamily="34" charset="0"/>
+                <a:ea typeface="Meiryo" pitchFamily="34" charset="-122"/>
+                <a:cs typeface="Meiryo" pitchFamily="34" charset="-120"/>
+              </a:rPr>
+              <a:t>24.95%</a:t>
+            </a:r>
+            <a:endParaRPr lang="en-US" sz="1700" dirty="0"/>
+          </a:p>
+        </p:txBody>
+      </p:sp>
+      <p:sp>
+        <p:nvSpPr>
+          <p:cNvPr id="25" name="Text 23"/>
+          <p:cNvSpPr txBox="1"/>
+          <p:nvPr/>
+        </p:nvSpPr>
+        <p:spPr>
+          <a:xfrm>
+            <a:off x="3630168" y="3968496"/>
+            <a:ext cx="2148840" cy="457200"/>
           </a:xfrm>
           <a:prstGeom prst="rect">
             <a:avLst/>
@@ -10789,47 +10945,47 @@
           <a:p>
             <a:pPr indent="0" marL="0">
               <a:lnSpc>
-                <a:spcPct val="120000"/>
+                <a:spcPct val="115000"/>
               </a:lnSpc>
               <a:buNone/>
             </a:pPr>
             <a:r>
-              <a:rPr lang="en-US" sz="950" dirty="0">
-                <a:solidFill>
-                  <a:srgbClr val="3D4E60"/>
-                </a:solidFill>
-                <a:latin typeface="Meiryo" pitchFamily="34" charset="0"/>
-                <a:ea typeface="Meiryo" pitchFamily="34" charset="-122"/>
-                <a:cs typeface="Meiryo" pitchFamily="34" charset="-120"/>
-              </a:rPr>
-              <a:t>634,223株を取得して太田氏側30.80%と並びます。ただし市場から吸収する株が減るため、流通株式比率の確保が難しくなります。</a:t>
-            </a:r>
-            <a:endParaRPr lang="en-US" sz="950" dirty="0"/>
-          </a:p>
-        </p:txBody>
-      </p:sp>
-      <p:sp>
-        <p:nvSpPr>
-          <p:cNvPr id="22" name="Shape 20"/>
+              <a:rPr lang="en-US" sz="900" dirty="0">
+                <a:solidFill>
+                  <a:srgbClr val="8A2E26"/>
+                </a:solidFill>
+                <a:latin typeface="Meiryo" pitchFamily="34" charset="0"/>
+                <a:ea typeface="Meiryo" pitchFamily="34" charset="-122"/>
+                <a:cs typeface="Meiryo" pitchFamily="34" charset="-120"/>
+              </a:rPr>
+              <a:t>25%基準に抵触</a:t>
+            </a:r>
+            <a:endParaRPr lang="en-US" sz="900" dirty="0"/>
+          </a:p>
+        </p:txBody>
+      </p:sp>
+      <p:sp>
+        <p:nvSpPr>
+          <p:cNvPr id="26" name="Shape 24"/>
           <p:cNvSpPr/>
           <p:nvPr/>
         </p:nvSpPr>
         <p:spPr>
           <a:xfrm>
-            <a:off x="7955280" y="1536192"/>
-            <a:ext cx="3520440" cy="3200400"/>
+            <a:off x="6163056" y="1536192"/>
+            <a:ext cx="2606040" cy="3017520"/>
           </a:xfrm>
           <a:prstGeom prst="roundRect">
             <a:avLst>
-              <a:gd name="adj" fmla="val 1714"/>
+              <a:gd name="adj" fmla="val 2105"/>
             </a:avLst>
           </a:prstGeom>
           <a:solidFill>
-            <a:srgbClr val="FBF1F3"/>
+            <a:srgbClr val="FFFFFF"/>
           </a:solidFill>
           <a:ln w="12700">
             <a:solidFill>
-              <a:srgbClr val="E3CBD1"/>
+              <a:srgbClr val="D9E0E7"/>
             </a:solidFill>
             <a:prstDash val="solid"/>
           </a:ln>
@@ -10844,14 +11000,14 @@
       </p:sp>
       <p:sp>
         <p:nvSpPr>
-          <p:cNvPr id="23" name="Shape 21"/>
+          <p:cNvPr id="27" name="Shape 25"/>
           <p:cNvSpPr/>
           <p:nvPr/>
         </p:nvSpPr>
         <p:spPr>
           <a:xfrm>
-            <a:off x="8229600" y="1737360"/>
-            <a:ext cx="457200" cy="292608"/>
+            <a:off x="6391656" y="1719072"/>
+            <a:ext cx="420624" cy="274320"/>
           </a:xfrm>
           <a:prstGeom prst="roundRect">
             <a:avLst>
@@ -10866,184 +11022,14 @@
       </p:sp>
       <p:sp>
         <p:nvSpPr>
-          <p:cNvPr id="24" name="Text 22"/>
-          <p:cNvSpPr txBox="1"/>
-          <p:nvPr/>
-        </p:nvSpPr>
-        <p:spPr>
-          <a:xfrm>
-            <a:off x="8229600" y="1737360"/>
-            <a:ext cx="457200" cy="292608"/>
-          </a:xfrm>
-          <a:prstGeom prst="rect">
-            <a:avLst/>
-          </a:prstGeom>
-          <a:noFill/>
-          <a:ln/>
-        </p:spPr>
-        <p:txBody>
-          <a:bodyPr wrap="square" lIns="0" tIns="0" rIns="0" bIns="0" rtlCol="0" anchor="ctr"/>
-          <a:lstStyle/>
-          <a:p>
-            <a:pPr algn="ctr" indent="0" marL="0">
-              <a:buNone/>
-            </a:pPr>
-            <a:r>
-              <a:rPr lang="en-US" sz="1150" b="1" dirty="0">
-                <a:solidFill>
-                  <a:srgbClr val="FFFFFF"/>
-                </a:solidFill>
-                <a:latin typeface="Meiryo" pitchFamily="34" charset="0"/>
-                <a:ea typeface="Meiryo" pitchFamily="34" charset="-122"/>
-                <a:cs typeface="Meiryo" pitchFamily="34" charset="-120"/>
-              </a:rPr>
-              <a:t>C</a:t>
-            </a:r>
-            <a:endParaRPr lang="en-US" sz="1150" dirty="0"/>
-          </a:p>
-        </p:txBody>
-      </p:sp>
-      <p:sp>
-        <p:nvSpPr>
-          <p:cNvPr id="25" name="Text 23"/>
-          <p:cNvSpPr txBox="1"/>
-          <p:nvPr/>
-        </p:nvSpPr>
-        <p:spPr>
-          <a:xfrm>
-            <a:off x="8823960" y="1737360"/>
-            <a:ext cx="2468880" cy="292608"/>
-          </a:xfrm>
-          <a:prstGeom prst="rect">
-            <a:avLst/>
-          </a:prstGeom>
-          <a:noFill/>
-          <a:ln/>
-        </p:spPr>
-        <p:txBody>
-          <a:bodyPr wrap="square" lIns="0" tIns="0" rIns="0" bIns="0" rtlCol="0" anchor="ctr"/>
-          <a:lstStyle/>
-          <a:p>
-            <a:pPr indent="0" marL="0">
-              <a:buNone/>
-            </a:pPr>
-            <a:r>
-              <a:rPr lang="en-US" sz="1300" b="1" dirty="0">
-                <a:solidFill>
-                  <a:srgbClr val="1E2A38"/>
-                </a:solidFill>
-                <a:latin typeface="Meiryo" pitchFamily="34" charset="0"/>
-                <a:ea typeface="Meiryo" pitchFamily="34" charset="-122"/>
-                <a:cs typeface="Meiryo" pitchFamily="34" charset="-120"/>
-              </a:rPr>
-              <a:t>ビジョン株を全部買い取る</a:t>
-            </a:r>
-            <a:endParaRPr lang="en-US" sz="1300" dirty="0"/>
-          </a:p>
-        </p:txBody>
-      </p:sp>
-      <p:sp>
-        <p:nvSpPr>
-          <p:cNvPr id="26" name="Text 24"/>
-          <p:cNvSpPr txBox="1"/>
-          <p:nvPr/>
-        </p:nvSpPr>
-        <p:spPr>
-          <a:xfrm>
-            <a:off x="8229600" y="2157984"/>
-            <a:ext cx="2971800" cy="219456"/>
-          </a:xfrm>
-          <a:prstGeom prst="rect">
-            <a:avLst/>
-          </a:prstGeom>
-          <a:noFill/>
-          <a:ln/>
-        </p:spPr>
-        <p:txBody>
-          <a:bodyPr wrap="square" lIns="0" tIns="0" rIns="0" bIns="0" rtlCol="0" anchor="ctr"/>
-          <a:lstStyle/>
-          <a:p>
-            <a:pPr indent="0" marL="0">
-              <a:buNone/>
-            </a:pPr>
-            <a:r>
-              <a:rPr lang="en-US" sz="950" dirty="0">
-                <a:solidFill>
-                  <a:srgbClr val="7C8A99"/>
-                </a:solidFill>
-                <a:latin typeface="Meiryo" pitchFamily="34" charset="0"/>
-                <a:ea typeface="Meiryo" pitchFamily="34" charset="-122"/>
-                <a:cs typeface="Meiryo" pitchFamily="34" charset="-120"/>
-              </a:rPr>
-              <a:t>中野の必要資金</a:t>
-            </a:r>
-            <a:endParaRPr lang="en-US" sz="950" dirty="0"/>
-          </a:p>
-        </p:txBody>
-      </p:sp>
-      <p:sp>
-        <p:nvSpPr>
-          <p:cNvPr id="27" name="Text 25"/>
-          <p:cNvSpPr txBox="1"/>
-          <p:nvPr/>
-        </p:nvSpPr>
-        <p:spPr>
-          <a:xfrm>
-            <a:off x="8229600" y="2359152"/>
-            <a:ext cx="2971800" cy="512064"/>
-          </a:xfrm>
-          <a:prstGeom prst="rect">
-            <a:avLst/>
-          </a:prstGeom>
-          <a:noFill/>
-          <a:ln/>
-        </p:spPr>
-        <p:txBody>
-          <a:bodyPr wrap="square" lIns="0" tIns="0" rIns="0" bIns="0" rtlCol="0" anchor="ctr"/>
-          <a:lstStyle/>
-          <a:p>
-            <a:pPr indent="0" marL="0">
-              <a:buNone/>
-            </a:pPr>
-            <a:r>
-              <a:rPr lang="en-US" sz="3000" b="1" dirty="0">
-                <a:solidFill>
-                  <a:srgbClr val="8A2E26"/>
-                </a:solidFill>
-                <a:latin typeface="Meiryo" pitchFamily="34" charset="0"/>
-                <a:ea typeface="Meiryo" pitchFamily="34" charset="-122"/>
-                <a:cs typeface="Meiryo" pitchFamily="34" charset="-120"/>
-              </a:rPr>
-              <a:t>7.02</a:t>
-            </a:r>
-            <a:pPr indent="0" marL="0">
-              <a:buNone/>
-            </a:pPr>
-            <a:r>
-              <a:rPr lang="en-US" sz="1300" b="1" dirty="0">
-                <a:solidFill>
-                  <a:srgbClr val="8A2E26"/>
-                </a:solidFill>
-                <a:latin typeface="Meiryo" pitchFamily="34" charset="0"/>
-                <a:ea typeface="Meiryo" pitchFamily="34" charset="-122"/>
-                <a:cs typeface="Meiryo" pitchFamily="34" charset="-120"/>
-              </a:rPr>
-              <a:t>億円</a:t>
-            </a:r>
-            <a:endParaRPr lang="en-US" sz="3000" dirty="0"/>
-          </a:p>
-        </p:txBody>
-      </p:sp>
-      <p:sp>
-        <p:nvSpPr>
           <p:cNvPr id="28" name="Text 26"/>
           <p:cNvSpPr txBox="1"/>
           <p:nvPr/>
         </p:nvSpPr>
         <p:spPr>
           <a:xfrm>
-            <a:off x="8229600" y="2926080"/>
-            <a:ext cx="2971800" cy="256032"/>
+            <a:off x="6391656" y="1719072"/>
+            <a:ext cx="420624" cy="274320"/>
           </a:xfrm>
           <a:prstGeom prst="rect">
             <a:avLst/>
@@ -11055,21 +11041,21 @@
           <a:bodyPr wrap="square" lIns="0" tIns="0" rIns="0" bIns="0" rtlCol="0" anchor="ctr"/>
           <a:lstStyle/>
           <a:p>
-            <a:pPr indent="0" marL="0">
-              <a:buNone/>
-            </a:pPr>
-            <a:r>
-              <a:rPr lang="en-US" sz="1200" b="1" dirty="0">
-                <a:solidFill>
-                  <a:srgbClr val="1E2A38"/>
-                </a:solidFill>
-                <a:latin typeface="Meiryo" pitchFamily="34" charset="0"/>
-                <a:ea typeface="Meiryo" pitchFamily="34" charset="-122"/>
-                <a:cs typeface="Meiryo" pitchFamily="34" charset="-120"/>
-              </a:rPr>
-              <a:t>中野 35.80%（単独筆頭）</a:t>
-            </a:r>
-            <a:endParaRPr lang="en-US" sz="1200" dirty="0"/>
+            <a:pPr algn="ctr" indent="0" marL="0">
+              <a:buNone/>
+            </a:pPr>
+            <a:r>
+              <a:rPr lang="en-US" sz="1150" b="1" dirty="0">
+                <a:solidFill>
+                  <a:srgbClr val="FFFFFF"/>
+                </a:solidFill>
+                <a:latin typeface="Meiryo" pitchFamily="34" charset="0"/>
+                <a:ea typeface="Meiryo" pitchFamily="34" charset="-122"/>
+                <a:cs typeface="Meiryo" pitchFamily="34" charset="-120"/>
+              </a:rPr>
+              <a:t>C</a:t>
+            </a:r>
+            <a:endParaRPr lang="en-US" sz="1150" dirty="0"/>
           </a:p>
         </p:txBody>
       </p:sp>
@@ -11081,8 +11067,8 @@
         </p:nvSpPr>
         <p:spPr>
           <a:xfrm>
-            <a:off x="8229600" y="3200400"/>
-            <a:ext cx="2971800" cy="256032"/>
+            <a:off x="6894576" y="1719072"/>
+            <a:ext cx="1691640" cy="274320"/>
           </a:xfrm>
           <a:prstGeom prst="rect">
             <a:avLst/>
@@ -11100,13 +11086,13 @@
             <a:r>
               <a:rPr lang="en-US" sz="1100" b="1" dirty="0">
                 <a:solidFill>
-                  <a:srgbClr val="8A2E26"/>
-                </a:solidFill>
-                <a:latin typeface="Meiryo" pitchFamily="34" charset="0"/>
-                <a:ea typeface="Meiryo" pitchFamily="34" charset="-122"/>
-                <a:cs typeface="Meiryo" pitchFamily="34" charset="-120"/>
-              </a:rPr>
-              <a:t>流通株式比率 19.95%</a:t>
+                  <a:srgbClr val="1E2A38"/>
+                </a:solidFill>
+                <a:latin typeface="Meiryo" pitchFamily="34" charset="0"/>
+                <a:ea typeface="Meiryo" pitchFamily="34" charset="-122"/>
+                <a:cs typeface="Meiryo" pitchFamily="34" charset="-120"/>
+              </a:rPr>
+              <a:t>全部を買い取る</a:t>
             </a:r>
             <a:endParaRPr lang="en-US" sz="1100" dirty="0"/>
           </a:p>
@@ -11120,8 +11106,256 @@
         </p:nvSpPr>
         <p:spPr>
           <a:xfrm>
-            <a:off x="8229600" y="3547872"/>
-            <a:ext cx="2971800" cy="1097280"/>
+            <a:off x="6391656" y="2121408"/>
+            <a:ext cx="2148840" cy="219456"/>
+          </a:xfrm>
+          <a:prstGeom prst="rect">
+            <a:avLst/>
+          </a:prstGeom>
+          <a:noFill/>
+          <a:ln/>
+        </p:spPr>
+        <p:txBody>
+          <a:bodyPr wrap="square" lIns="0" tIns="0" rIns="0" bIns="0" rtlCol="0" anchor="ctr"/>
+          <a:lstStyle/>
+          <a:p>
+            <a:pPr indent="0" marL="0">
+              <a:buNone/>
+            </a:pPr>
+            <a:r>
+              <a:rPr lang="en-US" sz="900" dirty="0">
+                <a:solidFill>
+                  <a:srgbClr val="7C8A99"/>
+                </a:solidFill>
+                <a:latin typeface="Meiryo" pitchFamily="34" charset="0"/>
+                <a:ea typeface="Meiryo" pitchFamily="34" charset="-122"/>
+                <a:cs typeface="Meiryo" pitchFamily="34" charset="-120"/>
+              </a:rPr>
+              <a:t>中野の必要資金</a:t>
+            </a:r>
+            <a:endParaRPr lang="en-US" sz="900" dirty="0"/>
+          </a:p>
+        </p:txBody>
+      </p:sp>
+      <p:sp>
+        <p:nvSpPr>
+          <p:cNvPr id="31" name="Text 29"/>
+          <p:cNvSpPr txBox="1"/>
+          <p:nvPr/>
+        </p:nvSpPr>
+        <p:spPr>
+          <a:xfrm>
+            <a:off x="6391656" y="2322576"/>
+            <a:ext cx="2148840" cy="457200"/>
+          </a:xfrm>
+          <a:prstGeom prst="rect">
+            <a:avLst/>
+          </a:prstGeom>
+          <a:noFill/>
+          <a:ln/>
+        </p:spPr>
+        <p:txBody>
+          <a:bodyPr wrap="square" lIns="0" tIns="0" rIns="0" bIns="0" rtlCol="0" anchor="ctr"/>
+          <a:lstStyle/>
+          <a:p>
+            <a:pPr indent="0" marL="0">
+              <a:buNone/>
+            </a:pPr>
+            <a:r>
+              <a:rPr lang="en-US" sz="2600" b="1" dirty="0">
+                <a:solidFill>
+                  <a:srgbClr val="8A2E26"/>
+                </a:solidFill>
+                <a:latin typeface="Meiryo" pitchFamily="34" charset="0"/>
+                <a:ea typeface="Meiryo" pitchFamily="34" charset="-122"/>
+                <a:cs typeface="Meiryo" pitchFamily="34" charset="-120"/>
+              </a:rPr>
+              <a:t>7.02</a:t>
+            </a:r>
+            <a:pPr indent="0" marL="0">
+              <a:buNone/>
+            </a:pPr>
+            <a:r>
+              <a:rPr lang="en-US" sz="1200" b="1" dirty="0">
+                <a:solidFill>
+                  <a:srgbClr val="8A2E26"/>
+                </a:solidFill>
+                <a:latin typeface="Meiryo" pitchFamily="34" charset="0"/>
+                <a:ea typeface="Meiryo" pitchFamily="34" charset="-122"/>
+                <a:cs typeface="Meiryo" pitchFamily="34" charset="-120"/>
+              </a:rPr>
+              <a:t>億円</a:t>
+            </a:r>
+            <a:endParaRPr lang="en-US" sz="2600" dirty="0"/>
+          </a:p>
+        </p:txBody>
+      </p:sp>
+      <p:sp>
+        <p:nvSpPr>
+          <p:cNvPr id="32" name="Text 30"/>
+          <p:cNvSpPr txBox="1"/>
+          <p:nvPr/>
+        </p:nvSpPr>
+        <p:spPr>
+          <a:xfrm>
+            <a:off x="6391656" y="2852928"/>
+            <a:ext cx="2148840" cy="219456"/>
+          </a:xfrm>
+          <a:prstGeom prst="rect">
+            <a:avLst/>
+          </a:prstGeom>
+          <a:noFill/>
+          <a:ln/>
+        </p:spPr>
+        <p:txBody>
+          <a:bodyPr wrap="square" lIns="0" tIns="0" rIns="0" bIns="0" rtlCol="0" anchor="ctr"/>
+          <a:lstStyle/>
+          <a:p>
+            <a:pPr indent="0" marL="0">
+              <a:buNone/>
+            </a:pPr>
+            <a:r>
+              <a:rPr lang="en-US" sz="900" dirty="0">
+                <a:solidFill>
+                  <a:srgbClr val="7C8A99"/>
+                </a:solidFill>
+                <a:latin typeface="Meiryo" pitchFamily="34" charset="0"/>
+                <a:ea typeface="Meiryo" pitchFamily="34" charset="-122"/>
+                <a:cs typeface="Meiryo" pitchFamily="34" charset="-120"/>
+              </a:rPr>
+              <a:t>中野の持分</a:t>
+            </a:r>
+            <a:endParaRPr lang="en-US" sz="900" dirty="0"/>
+          </a:p>
+        </p:txBody>
+      </p:sp>
+      <p:sp>
+        <p:nvSpPr>
+          <p:cNvPr id="33" name="Text 31"/>
+          <p:cNvSpPr txBox="1"/>
+          <p:nvPr/>
+        </p:nvSpPr>
+        <p:spPr>
+          <a:xfrm>
+            <a:off x="6391656" y="3054096"/>
+            <a:ext cx="2148840" cy="256032"/>
+          </a:xfrm>
+          <a:prstGeom prst="rect">
+            <a:avLst/>
+          </a:prstGeom>
+          <a:noFill/>
+          <a:ln/>
+        </p:spPr>
+        <p:txBody>
+          <a:bodyPr wrap="square" lIns="0" tIns="0" rIns="0" bIns="0" rtlCol="0" anchor="ctr"/>
+          <a:lstStyle/>
+          <a:p>
+            <a:pPr indent="0" marL="0">
+              <a:buNone/>
+            </a:pPr>
+            <a:r>
+              <a:rPr lang="en-US" sz="1250" b="1" dirty="0">
+                <a:solidFill>
+                  <a:srgbClr val="1E2A38"/>
+                </a:solidFill>
+                <a:latin typeface="Meiryo" pitchFamily="34" charset="0"/>
+                <a:ea typeface="Meiryo" pitchFamily="34" charset="-122"/>
+                <a:cs typeface="Meiryo" pitchFamily="34" charset="-120"/>
+              </a:rPr>
+              <a:t>35.80%（単独筆頭）</a:t>
+            </a:r>
+            <a:endParaRPr lang="en-US" sz="1250" dirty="0"/>
+          </a:p>
+        </p:txBody>
+      </p:sp>
+      <p:sp>
+        <p:nvSpPr>
+          <p:cNvPr id="34" name="Text 32"/>
+          <p:cNvSpPr txBox="1"/>
+          <p:nvPr/>
+        </p:nvSpPr>
+        <p:spPr>
+          <a:xfrm>
+            <a:off x="6391656" y="3401568"/>
+            <a:ext cx="2148840" cy="219456"/>
+          </a:xfrm>
+          <a:prstGeom prst="rect">
+            <a:avLst/>
+          </a:prstGeom>
+          <a:noFill/>
+          <a:ln/>
+        </p:spPr>
+        <p:txBody>
+          <a:bodyPr wrap="square" lIns="0" tIns="0" rIns="0" bIns="0" rtlCol="0" anchor="ctr"/>
+          <a:lstStyle/>
+          <a:p>
+            <a:pPr indent="0" marL="0">
+              <a:buNone/>
+            </a:pPr>
+            <a:r>
+              <a:rPr lang="en-US" sz="900" dirty="0">
+                <a:solidFill>
+                  <a:srgbClr val="7C8A99"/>
+                </a:solidFill>
+                <a:latin typeface="Meiryo" pitchFamily="34" charset="0"/>
+                <a:ea typeface="Meiryo" pitchFamily="34" charset="-122"/>
+                <a:cs typeface="Meiryo" pitchFamily="34" charset="-120"/>
+              </a:rPr>
+              <a:t>流通株式比率</a:t>
+            </a:r>
+            <a:endParaRPr lang="en-US" sz="900" dirty="0"/>
+          </a:p>
+        </p:txBody>
+      </p:sp>
+      <p:sp>
+        <p:nvSpPr>
+          <p:cNvPr id="35" name="Text 33"/>
+          <p:cNvSpPr txBox="1"/>
+          <p:nvPr/>
+        </p:nvSpPr>
+        <p:spPr>
+          <a:xfrm>
+            <a:off x="6391656" y="3602736"/>
+            <a:ext cx="2148840" cy="310896"/>
+          </a:xfrm>
+          <a:prstGeom prst="rect">
+            <a:avLst/>
+          </a:prstGeom>
+          <a:noFill/>
+          <a:ln/>
+        </p:spPr>
+        <p:txBody>
+          <a:bodyPr wrap="square" lIns="0" tIns="0" rIns="0" bIns="0" rtlCol="0" anchor="ctr"/>
+          <a:lstStyle/>
+          <a:p>
+            <a:pPr indent="0" marL="0">
+              <a:buNone/>
+            </a:pPr>
+            <a:r>
+              <a:rPr lang="en-US" sz="1700" b="1" dirty="0">
+                <a:solidFill>
+                  <a:srgbClr val="8A2E26"/>
+                </a:solidFill>
+                <a:latin typeface="Meiryo" pitchFamily="34" charset="0"/>
+                <a:ea typeface="Meiryo" pitchFamily="34" charset="-122"/>
+                <a:cs typeface="Meiryo" pitchFamily="34" charset="-120"/>
+              </a:rPr>
+              <a:t>19.95%</a:t>
+            </a:r>
+            <a:endParaRPr lang="en-US" sz="1700" dirty="0"/>
+          </a:p>
+        </p:txBody>
+      </p:sp>
+      <p:sp>
+        <p:nvSpPr>
+          <p:cNvPr id="36" name="Text 34"/>
+          <p:cNvSpPr txBox="1"/>
+          <p:nvPr/>
+        </p:nvSpPr>
+        <p:spPr>
+          <a:xfrm>
+            <a:off x="6391656" y="3968496"/>
+            <a:ext cx="2148840" cy="457200"/>
           </a:xfrm>
           <a:prstGeom prst="rect">
             <a:avLst/>
@@ -11135,39 +11369,39 @@
           <a:p>
             <a:pPr indent="0" marL="0">
               <a:lnSpc>
-                <a:spcPct val="120000"/>
+                <a:spcPct val="115000"/>
               </a:lnSpc>
               <a:buNone/>
             </a:pPr>
             <a:r>
-              <a:rPr lang="en-US" sz="950" dirty="0">
-                <a:solidFill>
-                  <a:srgbClr val="3D4E60"/>
-                </a:solidFill>
-                <a:latin typeface="Meiryo" pitchFamily="34" charset="0"/>
-                <a:ea typeface="Meiryo" pitchFamily="34" charset="-122"/>
-                <a:cs typeface="Meiryo" pitchFamily="34" charset="-120"/>
-              </a:rPr>
-              <a:t>単独筆頭になりますが、ビジョン株が中野に移るだけなので流通株式は1株も増えず、上場維持基準に抵触したままです。</a:t>
-            </a:r>
-            <a:endParaRPr lang="en-US" sz="950" dirty="0"/>
-          </a:p>
-        </p:txBody>
-      </p:sp>
-      <p:sp>
-        <p:nvSpPr>
-          <p:cNvPr id="31" name="Shape 29"/>
+              <a:rPr lang="en-US" sz="900" dirty="0">
+                <a:solidFill>
+                  <a:srgbClr val="8A2E26"/>
+                </a:solidFill>
+                <a:latin typeface="Meiryo" pitchFamily="34" charset="0"/>
+                <a:ea typeface="Meiryo" pitchFamily="34" charset="-122"/>
+                <a:cs typeface="Meiryo" pitchFamily="34" charset="-120"/>
+              </a:rPr>
+              <a:t>25%基準に抵触</a:t>
+            </a:r>
+            <a:endParaRPr lang="en-US" sz="900" dirty="0"/>
+          </a:p>
+        </p:txBody>
+      </p:sp>
+      <p:sp>
+        <p:nvSpPr>
+          <p:cNvPr id="37" name="Shape 35"/>
           <p:cNvSpPr/>
           <p:nvPr/>
         </p:nvSpPr>
         <p:spPr>
           <a:xfrm>
-            <a:off x="640080" y="4919472"/>
-            <a:ext cx="10881360" cy="1005840"/>
+            <a:off x="8924544" y="1536192"/>
+            <a:ext cx="2606040" cy="3017520"/>
           </a:xfrm>
           <a:prstGeom prst="roundRect">
             <a:avLst>
-              <a:gd name="adj" fmla="val 5455"/>
+              <a:gd name="adj" fmla="val 2105"/>
             </a:avLst>
           </a:prstGeom>
           <a:solidFill>
@@ -11190,14 +11424,36 @@
       </p:sp>
       <p:sp>
         <p:nvSpPr>
-          <p:cNvPr id="32" name="Text 30"/>
+          <p:cNvPr id="38" name="Shape 36"/>
+          <p:cNvSpPr/>
+          <p:nvPr/>
+        </p:nvSpPr>
+        <p:spPr>
+          <a:xfrm>
+            <a:off x="9153144" y="1719072"/>
+            <a:ext cx="420624" cy="274320"/>
+          </a:xfrm>
+          <a:prstGeom prst="roundRect">
+            <a:avLst>
+              <a:gd name="adj" fmla="val 50000"/>
+            </a:avLst>
+          </a:prstGeom>
+          <a:solidFill>
+            <a:srgbClr val="8F5510"/>
+          </a:solidFill>
+          <a:ln/>
+        </p:spPr>
+      </p:sp>
+      <p:sp>
+        <p:nvSpPr>
+          <p:cNvPr id="39" name="Text 37"/>
           <p:cNvSpPr txBox="1"/>
           <p:nvPr/>
         </p:nvSpPr>
         <p:spPr>
           <a:xfrm>
-            <a:off x="960120" y="5084064"/>
-            <a:ext cx="5486400" cy="274320"/>
+            <a:off x="9153144" y="1719072"/>
+            <a:ext cx="420624" cy="274320"/>
           </a:xfrm>
           <a:prstGeom prst="rect">
             <a:avLst/>
@@ -11209,10 +11465,412 @@
           <a:bodyPr wrap="square" lIns="0" tIns="0" rIns="0" bIns="0" rtlCol="0" anchor="ctr"/>
           <a:lstStyle/>
           <a:p>
+            <a:pPr algn="ctr" indent="0" marL="0">
+              <a:buNone/>
+            </a:pPr>
+            <a:r>
+              <a:rPr lang="en-US" sz="1150" b="1" dirty="0">
+                <a:solidFill>
+                  <a:srgbClr val="FFFFFF"/>
+                </a:solidFill>
+                <a:latin typeface="Meiryo" pitchFamily="34" charset="0"/>
+                <a:ea typeface="Meiryo" pitchFamily="34" charset="-122"/>
+                <a:cs typeface="Meiryo" pitchFamily="34" charset="-120"/>
+              </a:rPr>
+              <a:t>D</a:t>
+            </a:r>
+            <a:endParaRPr lang="en-US" sz="1150" dirty="0"/>
+          </a:p>
+        </p:txBody>
+      </p:sp>
+      <p:sp>
+        <p:nvSpPr>
+          <p:cNvPr id="40" name="Text 38"/>
+          <p:cNvSpPr txBox="1"/>
+          <p:nvPr/>
+        </p:nvSpPr>
+        <p:spPr>
+          <a:xfrm>
+            <a:off x="9656064" y="1719072"/>
+            <a:ext cx="1691640" cy="274320"/>
+          </a:xfrm>
+          <a:prstGeom prst="rect">
+            <a:avLst/>
+          </a:prstGeom>
+          <a:noFill/>
+          <a:ln/>
+        </p:spPr>
+        <p:txBody>
+          <a:bodyPr wrap="square" lIns="0" tIns="0" rIns="0" bIns="0" rtlCol="0" anchor="ctr"/>
+          <a:lstStyle/>
+          <a:p>
             <a:pPr indent="0" marL="0">
               <a:buNone/>
             </a:pPr>
             <a:r>
+              <a:rPr lang="en-US" sz="1100" b="1" dirty="0">
+                <a:solidFill>
+                  <a:srgbClr val="1E2A38"/>
+                </a:solidFill>
+                <a:latin typeface="Meiryo" pitchFamily="34" charset="0"/>
+                <a:ea typeface="Meiryo" pitchFamily="34" charset="-122"/>
+                <a:cs typeface="Meiryo" pitchFamily="34" charset="-120"/>
+              </a:rPr>
+              <a:t>上限まで買い、残りを市場へ</a:t>
+            </a:r>
+            <a:endParaRPr lang="en-US" sz="1100" dirty="0"/>
+          </a:p>
+        </p:txBody>
+      </p:sp>
+      <p:sp>
+        <p:nvSpPr>
+          <p:cNvPr id="41" name="Text 39"/>
+          <p:cNvSpPr txBox="1"/>
+          <p:nvPr/>
+        </p:nvSpPr>
+        <p:spPr>
+          <a:xfrm>
+            <a:off x="9153144" y="2121408"/>
+            <a:ext cx="2148840" cy="219456"/>
+          </a:xfrm>
+          <a:prstGeom prst="rect">
+            <a:avLst/>
+          </a:prstGeom>
+          <a:noFill/>
+          <a:ln/>
+        </p:spPr>
+        <p:txBody>
+          <a:bodyPr wrap="square" lIns="0" tIns="0" rIns="0" bIns="0" rtlCol="0" anchor="ctr"/>
+          <a:lstStyle/>
+          <a:p>
+            <a:pPr indent="0" marL="0">
+              <a:buNone/>
+            </a:pPr>
+            <a:r>
+              <a:rPr lang="en-US" sz="900" dirty="0">
+                <a:solidFill>
+                  <a:srgbClr val="7C8A99"/>
+                </a:solidFill>
+                <a:latin typeface="Meiryo" pitchFamily="34" charset="0"/>
+                <a:ea typeface="Meiryo" pitchFamily="34" charset="-122"/>
+                <a:cs typeface="Meiryo" pitchFamily="34" charset="-120"/>
+              </a:rPr>
+              <a:t>中野の必要資金</a:t>
+            </a:r>
+            <a:endParaRPr lang="en-US" sz="900" dirty="0"/>
+          </a:p>
+        </p:txBody>
+      </p:sp>
+      <p:sp>
+        <p:nvSpPr>
+          <p:cNvPr id="42" name="Text 40"/>
+          <p:cNvSpPr txBox="1"/>
+          <p:nvPr/>
+        </p:nvSpPr>
+        <p:spPr>
+          <a:xfrm>
+            <a:off x="9153144" y="2322576"/>
+            <a:ext cx="2148840" cy="457200"/>
+          </a:xfrm>
+          <a:prstGeom prst="rect">
+            <a:avLst/>
+          </a:prstGeom>
+          <a:noFill/>
+          <a:ln/>
+        </p:spPr>
+        <p:txBody>
+          <a:bodyPr wrap="square" lIns="0" tIns="0" rIns="0" bIns="0" rtlCol="0" anchor="ctr"/>
+          <a:lstStyle/>
+          <a:p>
+            <a:pPr indent="0" marL="0">
+              <a:buNone/>
+            </a:pPr>
+            <a:r>
+              <a:rPr lang="en-US" sz="2600" b="1" dirty="0">
+                <a:solidFill>
+                  <a:srgbClr val="8F5510"/>
+                </a:solidFill>
+                <a:latin typeface="Meiryo" pitchFamily="34" charset="0"/>
+                <a:ea typeface="Meiryo" pitchFamily="34" charset="-122"/>
+                <a:cs typeface="Meiryo" pitchFamily="34" charset="-120"/>
+              </a:rPr>
+              <a:t>5.26</a:t>
+            </a:r>
+            <a:pPr indent="0" marL="0">
+              <a:buNone/>
+            </a:pPr>
+            <a:r>
+              <a:rPr lang="en-US" sz="1200" b="1" dirty="0">
+                <a:solidFill>
+                  <a:srgbClr val="8F5510"/>
+                </a:solidFill>
+                <a:latin typeface="Meiryo" pitchFamily="34" charset="0"/>
+                <a:ea typeface="Meiryo" pitchFamily="34" charset="-122"/>
+                <a:cs typeface="Meiryo" pitchFamily="34" charset="-120"/>
+              </a:rPr>
+              <a:t>億円</a:t>
+            </a:r>
+            <a:endParaRPr lang="en-US" sz="2600" dirty="0"/>
+          </a:p>
+        </p:txBody>
+      </p:sp>
+      <p:sp>
+        <p:nvSpPr>
+          <p:cNvPr id="43" name="Text 41"/>
+          <p:cNvSpPr txBox="1"/>
+          <p:nvPr/>
+        </p:nvSpPr>
+        <p:spPr>
+          <a:xfrm>
+            <a:off x="9153144" y="2852928"/>
+            <a:ext cx="2148840" cy="219456"/>
+          </a:xfrm>
+          <a:prstGeom prst="rect">
+            <a:avLst/>
+          </a:prstGeom>
+          <a:noFill/>
+          <a:ln/>
+        </p:spPr>
+        <p:txBody>
+          <a:bodyPr wrap="square" lIns="0" tIns="0" rIns="0" bIns="0" rtlCol="0" anchor="ctr"/>
+          <a:lstStyle/>
+          <a:p>
+            <a:pPr indent="0" marL="0">
+              <a:buNone/>
+            </a:pPr>
+            <a:r>
+              <a:rPr lang="en-US" sz="900" dirty="0">
+                <a:solidFill>
+                  <a:srgbClr val="7C8A99"/>
+                </a:solidFill>
+                <a:latin typeface="Meiryo" pitchFamily="34" charset="0"/>
+                <a:ea typeface="Meiryo" pitchFamily="34" charset="-122"/>
+                <a:cs typeface="Meiryo" pitchFamily="34" charset="-120"/>
+              </a:rPr>
+              <a:t>中野の持分</a:t>
+            </a:r>
+            <a:endParaRPr lang="en-US" sz="900" dirty="0"/>
+          </a:p>
+        </p:txBody>
+      </p:sp>
+      <p:sp>
+        <p:nvSpPr>
+          <p:cNvPr id="44" name="Text 42"/>
+          <p:cNvSpPr txBox="1"/>
+          <p:nvPr/>
+        </p:nvSpPr>
+        <p:spPr>
+          <a:xfrm>
+            <a:off x="9153144" y="3054096"/>
+            <a:ext cx="2148840" cy="256032"/>
+          </a:xfrm>
+          <a:prstGeom prst="rect">
+            <a:avLst/>
+          </a:prstGeom>
+          <a:noFill/>
+          <a:ln/>
+        </p:spPr>
+        <p:txBody>
+          <a:bodyPr wrap="square" lIns="0" tIns="0" rIns="0" bIns="0" rtlCol="0" anchor="ctr"/>
+          <a:lstStyle/>
+          <a:p>
+            <a:pPr indent="0" marL="0">
+              <a:buNone/>
+            </a:pPr>
+            <a:r>
+              <a:rPr lang="en-US" sz="1250" b="1" dirty="0">
+                <a:solidFill>
+                  <a:srgbClr val="1E2A38"/>
+                </a:solidFill>
+                <a:latin typeface="Meiryo" pitchFamily="34" charset="0"/>
+                <a:ea typeface="Meiryo" pitchFamily="34" charset="-122"/>
+                <a:cs typeface="Meiryo" pitchFamily="34" charset="-120"/>
+              </a:rPr>
+              <a:t>30.75%（第2位）</a:t>
+            </a:r>
+            <a:endParaRPr lang="en-US" sz="1250" dirty="0"/>
+          </a:p>
+        </p:txBody>
+      </p:sp>
+      <p:sp>
+        <p:nvSpPr>
+          <p:cNvPr id="45" name="Text 43"/>
+          <p:cNvSpPr txBox="1"/>
+          <p:nvPr/>
+        </p:nvSpPr>
+        <p:spPr>
+          <a:xfrm>
+            <a:off x="9153144" y="3401568"/>
+            <a:ext cx="2148840" cy="219456"/>
+          </a:xfrm>
+          <a:prstGeom prst="rect">
+            <a:avLst/>
+          </a:prstGeom>
+          <a:noFill/>
+          <a:ln/>
+        </p:spPr>
+        <p:txBody>
+          <a:bodyPr wrap="square" lIns="0" tIns="0" rIns="0" bIns="0" rtlCol="0" anchor="ctr"/>
+          <a:lstStyle/>
+          <a:p>
+            <a:pPr indent="0" marL="0">
+              <a:buNone/>
+            </a:pPr>
+            <a:r>
+              <a:rPr lang="en-US" sz="900" dirty="0">
+                <a:solidFill>
+                  <a:srgbClr val="7C8A99"/>
+                </a:solidFill>
+                <a:latin typeface="Meiryo" pitchFamily="34" charset="0"/>
+                <a:ea typeface="Meiryo" pitchFamily="34" charset="-122"/>
+                <a:cs typeface="Meiryo" pitchFamily="34" charset="-120"/>
+              </a:rPr>
+              <a:t>流通株式比率</a:t>
+            </a:r>
+            <a:endParaRPr lang="en-US" sz="900" dirty="0"/>
+          </a:p>
+        </p:txBody>
+      </p:sp>
+      <p:sp>
+        <p:nvSpPr>
+          <p:cNvPr id="46" name="Text 44"/>
+          <p:cNvSpPr txBox="1"/>
+          <p:nvPr/>
+        </p:nvSpPr>
+        <p:spPr>
+          <a:xfrm>
+            <a:off x="9153144" y="3602736"/>
+            <a:ext cx="2148840" cy="310896"/>
+          </a:xfrm>
+          <a:prstGeom prst="rect">
+            <a:avLst/>
+          </a:prstGeom>
+          <a:noFill/>
+          <a:ln/>
+        </p:spPr>
+        <p:txBody>
+          <a:bodyPr wrap="square" lIns="0" tIns="0" rIns="0" bIns="0" rtlCol="0" anchor="ctr"/>
+          <a:lstStyle/>
+          <a:p>
+            <a:pPr indent="0" marL="0">
+              <a:buNone/>
+            </a:pPr>
+            <a:r>
+              <a:rPr lang="en-US" sz="1700" b="1" dirty="0">
+                <a:solidFill>
+                  <a:srgbClr val="8F5510"/>
+                </a:solidFill>
+                <a:latin typeface="Meiryo" pitchFamily="34" charset="0"/>
+                <a:ea typeface="Meiryo" pitchFamily="34" charset="-122"/>
+                <a:cs typeface="Meiryo" pitchFamily="34" charset="-120"/>
+              </a:rPr>
+              <a:t>25.00%</a:t>
+            </a:r>
+            <a:endParaRPr lang="en-US" sz="1700" dirty="0"/>
+          </a:p>
+        </p:txBody>
+      </p:sp>
+      <p:sp>
+        <p:nvSpPr>
+          <p:cNvPr id="47" name="Text 45"/>
+          <p:cNvSpPr txBox="1"/>
+          <p:nvPr/>
+        </p:nvSpPr>
+        <p:spPr>
+          <a:xfrm>
+            <a:off x="9153144" y="3968496"/>
+            <a:ext cx="2148840" cy="457200"/>
+          </a:xfrm>
+          <a:prstGeom prst="rect">
+            <a:avLst/>
+          </a:prstGeom>
+          <a:noFill/>
+          <a:ln/>
+        </p:spPr>
+        <p:txBody>
+          <a:bodyPr wrap="square" lIns="0" tIns="0" rIns="0" bIns="0" rtlCol="0" anchor="ctr"/>
+          <a:lstStyle/>
+          <a:p>
+            <a:pPr indent="0" marL="0">
+              <a:lnSpc>
+                <a:spcPct val="115000"/>
+              </a:lnSpc>
+              <a:buNone/>
+            </a:pPr>
+            <a:r>
+              <a:rPr lang="en-US" sz="900" dirty="0">
+                <a:solidFill>
+                  <a:srgbClr val="8F5510"/>
+                </a:solidFill>
+                <a:latin typeface="Meiryo" pitchFamily="34" charset="0"/>
+                <a:ea typeface="Meiryo" pitchFamily="34" charset="-122"/>
+                <a:cs typeface="Meiryo" pitchFamily="34" charset="-120"/>
+              </a:rPr>
+              <a:t>東証グロース基準25%をクリア</a:t>
+            </a:r>
+            <a:endParaRPr lang="en-US" sz="900" dirty="0"/>
+          </a:p>
+        </p:txBody>
+      </p:sp>
+      <p:sp>
+        <p:nvSpPr>
+          <p:cNvPr id="48" name="Shape 46"/>
+          <p:cNvSpPr/>
+          <p:nvPr/>
+        </p:nvSpPr>
+        <p:spPr>
+          <a:xfrm>
+            <a:off x="640080" y="4709160"/>
+            <a:ext cx="5349240" cy="1234440"/>
+          </a:xfrm>
+          <a:prstGeom prst="roundRect">
+            <a:avLst>
+              <a:gd name="adj" fmla="val 4444"/>
+            </a:avLst>
+          </a:prstGeom>
+          <a:solidFill>
+            <a:srgbClr val="F7F3EC"/>
+          </a:solidFill>
+          <a:ln w="12700">
+            <a:solidFill>
+              <a:srgbClr val="E0D3BE"/>
+            </a:solidFill>
+            <a:prstDash val="solid"/>
+          </a:ln>
+          <a:effectLst>
+            <a:outerShdw sx="100000" sy="100000" kx="0" ky="0" algn="bl" rotWithShape="0" blurRad="101600" dist="12700" dir="5400000">
+              <a:srgbClr val="AAB4BE">
+                <a:alpha val="18000"/>
+              </a:srgbClr>
+            </a:outerShdw>
+          </a:effectLst>
+        </p:spPr>
+      </p:sp>
+      <p:sp>
+        <p:nvSpPr>
+          <p:cNvPr id="49" name="Text 47"/>
+          <p:cNvSpPr txBox="1"/>
+          <p:nvPr/>
+        </p:nvSpPr>
+        <p:spPr>
+          <a:xfrm>
+            <a:off x="914400" y="4864608"/>
+            <a:ext cx="4754880" cy="274320"/>
+          </a:xfrm>
+          <a:prstGeom prst="rect">
+            <a:avLst/>
+          </a:prstGeom>
+          <a:noFill/>
+          <a:ln/>
+        </p:spPr>
+        <p:txBody>
+          <a:bodyPr wrap="square" lIns="0" tIns="0" rIns="0" bIns="0" rtlCol="0" anchor="ctr"/>
+          <a:lstStyle/>
+          <a:p>
+            <a:pPr indent="0" marL="0">
+              <a:buNone/>
+            </a:pPr>
+            <a:r>
               <a:rPr lang="en-US" sz="1300" b="1" dirty="0">
                 <a:solidFill>
                   <a:srgbClr val="8F5510"/>
@@ -11221,7 +11879,7 @@
                 <a:ea typeface="Meiryo" pitchFamily="34" charset="-122"/>
                 <a:cs typeface="Meiryo" pitchFamily="34" charset="-120"/>
               </a:rPr>
-              <a:t>流通株式比率がA案を後押しします</a:t>
+              <a:t>D案は2,156株だけ足りません</a:t>
             </a:r>
             <a:endParaRPr lang="en-US" sz="1300" dirty="0"/>
           </a:p>
@@ -11229,14 +11887,14 @@
       </p:sp>
       <p:sp>
         <p:nvSpPr>
-          <p:cNvPr id="33" name="Text 31"/>
+          <p:cNvPr id="50" name="Text 48"/>
           <p:cNvSpPr txBox="1"/>
           <p:nvPr/>
         </p:nvSpPr>
         <p:spPr>
           <a:xfrm>
-            <a:off x="960120" y="5394960"/>
-            <a:ext cx="10241280" cy="457200"/>
+            <a:off x="914400" y="5175504"/>
+            <a:ext cx="4800600" cy="685800"/>
           </a:xfrm>
           <a:prstGeom prst="rect">
             <a:avLst/>
@@ -11249,10 +11907,13 @@
           <a:lstStyle/>
           <a:p>
             <a:pPr indent="0" marL="0">
-              <a:buNone/>
-            </a:pPr>
-            <a:r>
-              <a:rPr lang="en-US" sz="1100" dirty="0">
+              <a:lnSpc>
+                <a:spcPct val="120000"/>
+              </a:lnSpc>
+              <a:buNone/>
+            </a:pPr>
+            <a:r>
+              <a:rPr lang="en-US" sz="1000" dirty="0">
                 <a:solidFill>
                   <a:srgbClr val="3D4E60"/>
                 </a:solidFill>
@@ -11260,21 +11921,136 @@
                 <a:ea typeface="Meiryo" pitchFamily="34" charset="-122"/>
                 <a:cs typeface="Meiryo" pitchFamily="34" charset="-120"/>
               </a:rPr>
-              <a:t>合併直後の流通株式比率は19.95%で、東証グロースの上場維持基準25%を下回ります。ビジョン社の844,617株が市場に出れば40.02%となり基準を満たします。中野が買い取るB案・C案では、この問題が残ります。</a:t>
-            </a:r>
-            <a:endParaRPr lang="en-US" sz="1100" dirty="0"/>
-          </a:p>
-        </p:txBody>
-      </p:sp>
-      <p:sp>
-        <p:nvSpPr>
-          <p:cNvPr id="34" name="Text 32"/>
+              <a:t>B案との差額210,394株を市場に出すと流通株式比率は24.949%。25%まであと2,156株（0.051pt）です。基準ちょうどに合わせるなら中野の取得は632,067株（5.26億円）が上限で、太田氏側に2,156株届かない第2位にとどまります。</a:t>
+            </a:r>
+            <a:endParaRPr lang="en-US" sz="1000" dirty="0"/>
+          </a:p>
+        </p:txBody>
+      </p:sp>
+      <p:sp>
+        <p:nvSpPr>
+          <p:cNvPr id="51" name="Shape 49"/>
+          <p:cNvSpPr/>
+          <p:nvPr/>
+        </p:nvSpPr>
+        <p:spPr>
+          <a:xfrm>
+            <a:off x="6172200" y="4709160"/>
+            <a:ext cx="5349240" cy="1234440"/>
+          </a:xfrm>
+          <a:prstGeom prst="roundRect">
+            <a:avLst>
+              <a:gd name="adj" fmla="val 4444"/>
+            </a:avLst>
+          </a:prstGeom>
+          <a:solidFill>
+            <a:srgbClr val="F0F4F1"/>
+          </a:solidFill>
+          <a:ln w="12700">
+            <a:solidFill>
+              <a:srgbClr val="C9DCD1"/>
+            </a:solidFill>
+            <a:prstDash val="solid"/>
+          </a:ln>
+          <a:effectLst>
+            <a:outerShdw sx="100000" sy="100000" kx="0" ky="0" algn="bl" rotWithShape="0" blurRad="101600" dist="12700" dir="5400000">
+              <a:srgbClr val="AAB4BE">
+                <a:alpha val="18000"/>
+              </a:srgbClr>
+            </a:outerShdw>
+          </a:effectLst>
+        </p:spPr>
+      </p:sp>
+      <p:sp>
+        <p:nvSpPr>
+          <p:cNvPr id="52" name="Text 50"/>
           <p:cNvSpPr txBox="1"/>
           <p:nvPr/>
         </p:nvSpPr>
         <p:spPr>
           <a:xfrm>
-            <a:off x="640080" y="6108192"/>
+            <a:off x="6446520" y="4864608"/>
+            <a:ext cx="4754880" cy="274320"/>
+          </a:xfrm>
+          <a:prstGeom prst="rect">
+            <a:avLst/>
+          </a:prstGeom>
+          <a:noFill/>
+          <a:ln/>
+        </p:spPr>
+        <p:txBody>
+          <a:bodyPr wrap="square" lIns="0" tIns="0" rIns="0" bIns="0" rtlCol="0" anchor="ctr"/>
+          <a:lstStyle/>
+          <a:p>
+            <a:pPr indent="0" marL="0">
+              <a:buNone/>
+            </a:pPr>
+            <a:r>
+              <a:rPr lang="en-US" sz="1300" b="1" dirty="0">
+                <a:solidFill>
+                  <a:srgbClr val="2C6A4E"/>
+                </a:solidFill>
+                <a:latin typeface="Meiryo" pitchFamily="34" charset="0"/>
+                <a:ea typeface="Meiryo" pitchFamily="34" charset="-122"/>
+                <a:cs typeface="Meiryo" pitchFamily="34" charset="-120"/>
+              </a:rPr>
+              <a:t>旧あどばる法人6社も売れば、制約が外れます</a:t>
+            </a:r>
+            <a:endParaRPr lang="en-US" sz="1300" dirty="0"/>
+          </a:p>
+        </p:txBody>
+      </p:sp>
+      <p:sp>
+        <p:nvSpPr>
+          <p:cNvPr id="53" name="Text 51"/>
+          <p:cNvSpPr txBox="1"/>
+          <p:nvPr/>
+        </p:nvSpPr>
+        <p:spPr>
+          <a:xfrm>
+            <a:off x="6446520" y="5175504"/>
+            <a:ext cx="4800600" cy="685800"/>
+          </a:xfrm>
+          <a:prstGeom prst="rect">
+            <a:avLst/>
+          </a:prstGeom>
+          <a:noFill/>
+          <a:ln/>
+        </p:spPr>
+        <p:txBody>
+          <a:bodyPr wrap="square" lIns="0" tIns="0" rIns="0" bIns="0" rtlCol="0" anchor="ctr"/>
+          <a:lstStyle/>
+          <a:p>
+            <a:pPr indent="0" marL="0">
+              <a:lnSpc>
+                <a:spcPct val="120000"/>
+              </a:lnSpc>
+              <a:buNone/>
+            </a:pPr>
+            <a:r>
+              <a:rPr lang="en-US" sz="1000" dirty="0">
+                <a:solidFill>
+                  <a:srgbClr val="3D4E60"/>
+                </a:solidFill>
+                <a:latin typeface="Meiryo" pitchFamily="34" charset="0"/>
+                <a:ea typeface="Meiryo" pitchFamily="34" charset="-122"/>
+                <a:cs typeface="Meiryo" pitchFamily="34" charset="-120"/>
+              </a:rPr>
+              <a:t>BOS・エアトリ・KUMA・フィル・ベクトル・アンビションの計297,190株（2.47億円）は事業法人のため流通株式から除外されています。この6社も市場で売却すれば、B案フル（30.80%）でも32.01%、C案（35.80%）でも27.01%を確保できます。</a:t>
+            </a:r>
+            <a:endParaRPr lang="en-US" sz="1000" dirty="0"/>
+          </a:p>
+        </p:txBody>
+      </p:sp>
+      <p:sp>
+        <p:nvSpPr>
+          <p:cNvPr id="54" name="Text 52"/>
+          <p:cNvSpPr txBox="1"/>
+          <p:nvPr/>
+        </p:nvSpPr>
+        <p:spPr>
+          <a:xfrm>
+            <a:off x="640080" y="6126480"/>
             <a:ext cx="10881360" cy="274320"/>
           </a:xfrm>
           <a:prstGeom prst="rect">
@@ -11299,7 +12075,7 @@
                 <a:ea typeface="Meiryo" pitchFamily="34" charset="-122"/>
                 <a:cs typeface="Meiryo" pitchFamily="34" charset="-120"/>
               </a:rPr>
-              <a:t>中野の必要資金は1株831.53円（スマサポ20億÷2,405,200株）で計算しています。相対取得の実勢価格は交渉によります。</a:t>
+              <a:t>流通株式の算定には解釈の幅があります。太田玲氏の1.50%を流通に算入できる場合、D案は26.45%となり余裕が生まれます。東証への事前相談を要します。</a:t>
             </a:r>
             <a:endParaRPr lang="en-US" sz="900" dirty="0"/>
           </a:p>
